--- a/docs/demo/deck/dockrisk-deck.pptx
+++ b/docs/demo/deck/dockrisk-deck.pptx
@@ -517,17 +517,22 @@
           <a:lstStyle/>
           <a:p>
             <a:r>
-              <a:t>Open cold, on the bar. "This is one truck's Sunday. The hatched part is the two hours of free time the contract gives the customer. The amber is money. And this red tick — the one that matters — is the moment the driver's next load became impossible. It happens before the amber starts."</a:t>
-            </a:r>
-          </a:p>
-          <a:p>
-            <a:r>
-              <a:t> Then: "Nobody in city dispatch is watching that red tick. That's the whole talk."</a:t>
-            </a:r>
-          </a:p>
-          <a:p>
-            <a:r>
-              <a:t> Keep it to 40 seconds. Do not read the subtitle aloud.</a:t>
+              <a:t>차가운 상태로 시작. 슬라이드 아래 막대를 손으로 짚으면서 연다. 40초 안에 끝낸다. 부제는 소리 내어 읽지 말 것.</a:t>
+            </a:r>
+          </a:p>
+          <a:p>
+            <a:r>
+              <a:t> 말할 것: "This is one truck's Sunday. The hatched part is the two hours of free time the contract gives the customer. The amber is money. And this red tick — the one that matters — is the moment the driver's next load became impossible. It happens before the amber starts."</a:t>
+            </a:r>
+          </a:p>
+          <a:p>
+            <a:r>
+              <a:t> 그 다음: "Nobody in city dispatch is watching that red tick. That's the whole talk."</a:t>
+            </a:r>
+          </a:p>
+          <a:p>
+            <a:r>
+              <a:t> 속도: 40초. 여기서 늘어지면 뒤가 밀린다.</a:t>
             </a:r>
           </a:p>
         </p:txBody>
@@ -597,27 +602,22 @@
           <a:lstStyle/>
           <a:p>
             <a:r>
-              <a:t>• Note the amount on screen is $0.00 — deliberately. Do not skip past it; it is the strongest slide in the deck. "This stop did not earn a charge, and the packet says why. A tool that only shows you the wins is a tool nobody trusts on Monday." </a:t>
-            </a:r>
-          </a:p>
-          <a:p>
-            <a:r>
-              <a:t> </a:t>
-            </a:r>
-          </a:p>
-          <a:p>
-            <a:r>
-              <a:t>• The red review block is the same idea: the system refuses to bill against a city-centroid facility and says so. </a:t>
-            </a:r>
-          </a:p>
-          <a:p>
-            <a:r>
-              <a:t> </a:t>
-            </a:r>
-          </a:p>
-          <a:p>
-            <a:r>
-              <a:t>• If a judge is a carrier operator, this is the slide they will ask about. Let them.</a:t>
+              <a:t>화면의 금액이 $0.00인 것은 의도적이다. 그냥 넘기지 마라 — 덱에서 가장 강한 슬라이드다.</a:t>
+            </a:r>
+          </a:p>
+          <a:p>
+            <a:r>
+              <a:t> 말할 것: "This stop did not earn a charge, and the packet says why. A tool that only shows you the wins is a tool nobody trusts on Monday."</a:t>
+            </a:r>
+          </a:p>
+          <a:p>
+            <a:r>
+              <a:t> 빨간 검토 블록도 같은 생각이다. 도시 중심점으로 추정한 시설에 대해서는 시스템이 청구를 거부하고 이유를 말한다. </a:t>
+            </a:r>
+          </a:p>
+          <a:p>
+            <a:r>
+              <a:t> 심사위원 중에 운송사 운영자가 있으면 이 슬라이드를 물어본다. 물어보게 둬라.</a:t>
             </a:r>
           </a:p>
         </p:txBody>
@@ -687,27 +687,22 @@
           <a:lstStyle/>
           <a:p>
             <a:r>
-              <a:t>• Best Use of AI is a special award, and the honest framing wins it more often than a bigger model does. </a:t>
-            </a:r>
-          </a:p>
-          <a:p>
-            <a:r>
-              <a:t> </a:t>
-            </a:r>
-          </a:p>
-          <a:p>
-            <a:r>
-              <a:t>• Say the rule plainly: "the model reads and writes. It never counts." Judges have sat through six demos where an LLM confidently invented a dollar figure. </a:t>
-            </a:r>
-          </a:p>
-          <a:p>
-            <a:r>
-              <a:t> </a:t>
-            </a:r>
-          </a:p>
-          <a:p>
-            <a:r>
-              <a:t>• Point at the pre-send checklist. The system is arguing against its own draft — that is the detail worth ten seconds.</a:t>
+              <a:t>Best Use of AI는 특별상인데, 정직한 프레이밍이 더 큰 모델보다 자주 이긴다. </a:t>
+            </a:r>
+          </a:p>
+          <a:p>
+            <a:r>
+              <a:t> 규칙을 평범하게 말할 것: "The model reads and writes. It never counts."</a:t>
+            </a:r>
+          </a:p>
+          <a:p>
+            <a:r>
+              <a:t> 심사위원은 오늘 하루 LLM이 자신만만하게 금액을 지어내는 데모를 여섯 번쯤 봤다.</a:t>
+            </a:r>
+          </a:p>
+          <a:p>
+            <a:r>
+              <a:t> 전송 전 확인 목록을 가리켜라. 시스템이 자기 초안을 스스로 반박하고 있다 — 그 디테일이 10초 값어치를 한다.</a:t>
             </a:r>
           </a:p>
         </p:txBody>
@@ -777,27 +772,17 @@
           <a:lstStyle/>
           <a:p>
             <a:r>
-              <a:t>• This is a quiet slide that answers the obvious challenge — "our contracts are all different" — before anyone asks it. </a:t>
-            </a:r>
-          </a:p>
-          <a:p>
-            <a:r>
-              <a:t> </a:t>
-            </a:r>
-          </a:p>
-          <a:p>
-            <a:r>
-              <a:t>• The 225 / 32 split is real and comes from the export. Use it; it proves the point better than the argument does. </a:t>
-            </a:r>
-          </a:p>
-          <a:p>
-            <a:r>
-              <a:t> </a:t>
-            </a:r>
-          </a:p>
-          <a:p>
-            <a:r>
-              <a:t>• Forty seconds. If you are running long, this is the first slide to cut.</a:t>
+              <a:t>조용한 슬라이드인데, "우리 계약은 다 다르다" 는 뻔한 반론을 누가 말하기 전에 답한다.</a:t>
+            </a:r>
+          </a:p>
+          <a:p>
+            <a:r>
+              <a:t> 225 대 32 분할은 추출본에서 나온 실제 숫자 다. 논증보다 이게 더 잘 증명한다.</a:t>
+            </a:r>
+          </a:p>
+          <a:p>
+            <a:r>
+              <a:t> 속도: 40초. 시간이 밀리면 제일 먼저 잘라낼 슬라이드가 이것이다.</a:t>
             </a:r>
           </a:p>
         </p:txBody>
@@ -867,27 +852,32 @@
           <a:lstStyle/>
           <a:p>
             <a:r>
-              <a:t>• Counter-intuitive but true: this slide wins points. Judges have spent the day being told everything works. Naming three things that do not is the fastest credibility you can buy. </a:t>
-            </a:r>
-          </a:p>
-          <a:p>
-            <a:r>
-              <a:t> </a:t>
-            </a:r>
-          </a:p>
-          <a:p>
-            <a:r>
-              <a:t>• The retraction story is the one to tell if you only tell one: "we found a bug in their data, we were wrong, we wrote down that we were wrong." That is Problem Discovery, which the brief lists as a judged area. </a:t>
-            </a:r>
-          </a:p>
-          <a:p>
-            <a:r>
-              <a:t> </a:t>
-            </a:r>
-          </a:p>
-          <a:p>
-            <a:r>
-              <a:t>• Do not sound apologetic. Deliver it as engineering discipline, because it is.</a:t>
+              <a:t>직관에 반하지만 이 슬라이드가 점수를 번다. 심사위원은 하루 종일 "다 됩니다"를 들었다.</a:t>
+            </a:r>
+          </a:p>
+          <a:p>
+            <a:r>
+              <a:t> 안 되는 것 세 가지를 이름 붙여 말하는 게 가장 빠른 신뢰 다.</a:t>
+            </a:r>
+          </a:p>
+          <a:p>
+            <a:r>
+              <a:t> 하나만 말한다면 철회 이야기를 해라.</a:t>
+            </a:r>
+          </a:p>
+          <a:p>
+            <a:r>
+              <a:t> 말할 것: "We found a bug in their data, we were wrong, and we wrote down that we were wrong."</a:t>
+            </a:r>
+          </a:p>
+          <a:p>
+            <a:r>
+              <a:t> 그게 브리프가 채점 항목으로 적어둔 Problem Discovery다.</a:t>
+            </a:r>
+          </a:p>
+          <a:p>
+            <a:r>
+              <a:t> 사과하는 투로 말하지 마라. 공학적 규율로 전달해라. 실제로 그렇기 때문이다.</a:t>
             </a:r>
           </a:p>
         </p:txBody>
@@ -957,27 +947,22 @@
           <a:lstStyle/>
           <a:p>
             <a:r>
-              <a:t>• Use of Provided Data &amp; APIs is 15%, and this slide is the whole of it. Do not skip it to save time — cut slide 12 instead. </a:t>
-            </a:r>
-          </a:p>
-          <a:p>
-            <a:r>
-              <a:t> </a:t>
-            </a:r>
-          </a:p>
-          <a:p>
-            <a:r>
-              <a:t>• Say "satellite toggle" explicitly. The brief states it twice, which means it is on someone's checklist. </a:t>
-            </a:r>
-          </a:p>
-          <a:p>
-            <a:r>
-              <a:t> </a:t>
-            </a:r>
-          </a:p>
-          <a:p>
-            <a:r>
-              <a:t>• The last row is the argument: the bonus question was not an add-on for us, it was the reason the product exists.</a:t>
+              <a:t>Use of Provided Data &amp; APIs가 15%인데 이 슬라이드가 그 전부 다.</a:t>
+            </a:r>
+          </a:p>
+          <a:p>
+            <a:r>
+              <a:t> 시간 아끼려고 건너뛰지 마라 — 대신 12번을 잘라라. </a:t>
+            </a:r>
+          </a:p>
+          <a:p>
+            <a:r>
+              <a:t> "satellite toggle"을 명시적으로 말해라. 브리프가 두 번 적어놨다. 누군가의 체크리스트에 있다는 뜻이다.</a:t>
+            </a:r>
+          </a:p>
+          <a:p>
+            <a:r>
+              <a:t> 마지막 줄이 논증이다 — 보너스 질문은 우리에게 부록이 아니라 제품이 존재하는 이유 였다.</a:t>
             </a:r>
           </a:p>
         </p:txBody>
@@ -1047,27 +1032,17 @@
           <a:lstStyle/>
           <a:p>
             <a:r>
-              <a:t>• Move fast here — thirty seconds. A stack list does not win anything on its own; the two boxes on the right do. </a:t>
-            </a:r>
-          </a:p>
-          <a:p>
-            <a:r>
-              <a:t> </a:t>
-            </a:r>
-          </a:p>
-          <a:p>
-            <a:r>
-              <a:t>• "Survives an API restart" and "deterministic from a seed" are the phrases that matter to a technical judge. Say both. </a:t>
-            </a:r>
-          </a:p>
-          <a:p>
-            <a:r>
-              <a:t> </a:t>
-            </a:r>
-          </a:p>
-          <a:p>
-            <a:r>
-              <a:t>• If someone asks why a separate simulator: the brief requires it, and it is also the only honest way to demo a historical export where every leg is already finished.</a:t>
+              <a:t>빠르게 지나간다 — 30초. 기술 스택 나열은 그 자체로는 아무것도 못 번다. 오른쪽 두 상자가 번다.</a:t>
+            </a:r>
+          </a:p>
+          <a:p>
+            <a:r>
+              <a:t> 이 두 문장은 꼭 말할 것: "It survives an API restart." / "It is deterministic from a seed."</a:t>
+            </a:r>
+          </a:p>
+          <a:p>
+            <a:r>
+              <a:t> "왜 시뮬레이터를 따로 뒀나?" 질문이 오면: "The brief requires it — and it is the only honest way to demo a historical export where every leg is already finished."</a:t>
             </a:r>
           </a:p>
         </p:txBody>
@@ -1137,27 +1112,32 @@
           <a:lstStyle/>
           <a:p>
             <a:r>
-              <a:t>• End on the sentence, not on "any questions?". Say it, tap the red tick, stop talking. </a:t>
-            </a:r>
-          </a:p>
-          <a:p>
-            <a:r>
-              <a:t> </a:t>
-            </a:r>
-          </a:p>
-          <a:p>
-            <a:r>
-              <a:t>• Leave this slide up through Q&amp;A — the URLs stay on screen while judges are writing. </a:t>
-            </a:r>
-          </a:p>
-          <a:p>
-            <a:r>
-              <a:t> </a:t>
-            </a:r>
-          </a:p>
-          <a:p>
-            <a:r>
-              <a:t>• Likely questions: why not just use the TMS? (it computes after the fact, from timestamps nobody enters) · how do you know the dwell prediction generalises? (we do not, past n=9 per city — that is why n is on screen) · what would you build next? (verified dock geometry, then the appointment renegotiation the desk currently does by phone).</a:t>
+              <a:t>문장으로 끝낸다. "질문 있나요?"로 끝내지 마라. 말하고, 빨간 눈금을 짚고, 입을 다문다.</a:t>
+            </a:r>
+          </a:p>
+          <a:p>
+            <a:r>
+              <a:t> 이 슬라이드를 Q&amp;A 내내 띄워둔다 — 심사위원이 적는 동안 URL이 화면에 남아 있게.</a:t>
+            </a:r>
+          </a:p>
+          <a:p>
+            <a:r>
+              <a:t> 예상 질문과 답: </a:t>
+            </a:r>
+          </a:p>
+          <a:p>
+            <a:r>
+              <a:t> "Why not just use the TMS?" — "It computes after the fact, from timestamps nobody enters."</a:t>
+            </a:r>
+          </a:p>
+          <a:p>
+            <a:r>
+              <a:t> "How do you know the dwell prediction generalises?" — "We do not, past n=9 per city. That is why n is on the screen."</a:t>
+            </a:r>
+          </a:p>
+          <a:p>
+            <a:r>
+              <a:t> "What would you build next?" — "Verified dock geometry, then the appointment renegotiation the desk currently does by phone."</a:t>
             </a:r>
           </a:p>
         </p:txBody>
@@ -1227,27 +1207,22 @@
           <a:lstStyle/>
           <a:p>
             <a:r>
-              <a:t>• Land the asymmetry: the visible loss is an accounting problem, the invisible one is an operations problem. Only the second one is still open. </a:t>
-            </a:r>
-          </a:p>
-          <a:p>
-            <a:r>
-              <a:t> </a:t>
-            </a:r>
-          </a:p>
-          <a:p>
-            <a:r>
-              <a:t>• The last line is the organizers' own bonus-focus question, quoted from the brief. Say that out loud — "this is your question, not ours." It buys credibility for the next four minutes. </a:t>
-            </a:r>
-          </a:p>
-          <a:p>
-            <a:r>
-              <a:t> </a:t>
-            </a:r>
-          </a:p>
-          <a:p>
-            <a:r>
-              <a:t>• ~60 seconds. Do not linger; the numbers slide does the convincing.</a:t>
+              <a:t>비대칭을 꽂는 게 목적이다. 보이는 손실은 회계 문제, 안 보이는 손실은 운영 문제다. 아직 안 풀린 건 두 번째뿐.</a:t>
+            </a:r>
+          </a:p>
+          <a:p>
+            <a:r>
+              <a:t> 마지막 줄은 주최측 브리프의 보너스 질문을 그대로 인용한 것 이다. 그걸 소리 내어 말하면 신뢰가 생긴다.</a:t>
+            </a:r>
+          </a:p>
+          <a:p>
+            <a:r>
+              <a:t> 말할 것: "This is your question, not ours."</a:t>
+            </a:r>
+          </a:p>
+          <a:p>
+            <a:r>
+              <a:t> 속도: 60초. 오래 끌지 말 것 — 설득은 다음 숫자 슬라이드가 한다.</a:t>
             </a:r>
           </a:p>
         </p:txBody>
@@ -1317,37 +1292,22 @@
           <a:lstStyle/>
           <a:p>
             <a:r>
-              <a:t>• This is the Industry Impact slide — 25% of the score, the heaviest single criterion. Slow down here. </a:t>
-            </a:r>
-          </a:p>
-          <a:p>
-            <a:r>
-              <a:t> </a:t>
-            </a:r>
-          </a:p>
-          <a:p>
-            <a:r>
-              <a:t>• Point at $31k and say: "that is one month, one mid-size carrier, from your file." </a:t>
-            </a:r>
-          </a:p>
-          <a:p>
-            <a:r>
-              <a:t> </a:t>
-            </a:r>
-          </a:p>
-          <a:p>
-            <a:r>
-              <a:t>• The last paragraph is deliberate. A fleet GM in the room will grade you on saying exposure instead of unbilled . Say the distinction out loud — it signals you read the data instead of the pitch deck. </a:t>
-            </a:r>
-          </a:p>
-          <a:p>
-            <a:r>
-              <a:t> </a:t>
-            </a:r>
-          </a:p>
-          <a:p>
-            <a:r>
-              <a:t>• If asked "is 79% precision good?" — answer: a false positive costs a dispatcher one glance; a false negative costs the charge and the load.</a:t>
+              <a:t>Industry Impact 슬라이드다. 25%로 배점이 가장 크다. 여기서 속도를 늦춘다. $31k를 손으로 가리킨다.</a:t>
+            </a:r>
+          </a:p>
+          <a:p>
+            <a:r>
+              <a:t> 말할 것: "That is one month, one mid-size carrier, from your file."</a:t>
+            </a:r>
+          </a:p>
+          <a:p>
+            <a:r>
+              <a:t> 마지막 문단이 핵심이다. 현장 운송사 임원은 unbilled 대신 exposure 라고 말하는지로 채점한다. 그 구분을 소리 내어 말하면 "데이터를 읽었다"는 신호가 된다.</a:t>
+            </a:r>
+          </a:p>
+          <a:p>
+            <a:r>
+              <a:t> "79% 정확도면 좋은 건가?" 질문이 오면: "A false positive costs a dispatcher one glance. A false negative costs the charge and the load."</a:t>
             </a:r>
           </a:p>
         </p:txBody>
@@ -1417,37 +1377,27 @@
           <a:lstStyle/>
           <a:p>
             <a:r>
-              <a:t>• The point of this slide is why nobody has solved it already : the average stop looks fine. You cannot staff for a problem whose median is "no problem." </a:t>
-            </a:r>
-          </a:p>
-          <a:p>
-            <a:r>
-              <a:t> </a:t>
-            </a:r>
-          </a:p>
-          <a:p>
-            <a:r>
-              <a:t>• "Nearly three times" — say the two numbers, $41.9k and $15.0k, don't just say the ratio. </a:t>
-            </a:r>
-          </a:p>
-          <a:p>
-            <a:r>
-              <a:t> </a:t>
-            </a:r>
-          </a:p>
-          <a:p>
-            <a:r>
-              <a:t>• The chart on the right is a real product screen, not a slide graphic. Mention that once; it earns Technical Execution points quietly. </a:t>
-            </a:r>
-          </a:p>
-          <a:p>
-            <a:r>
-              <a:t> </a:t>
-            </a:r>
-          </a:p>
-          <a:p>
-            <a:r>
-              <a:t>• ~50 seconds.</a:t>
+              <a:t>이 슬라이드의 목적은 왜 아무도 이걸 이미 풀지 않았나 다. 평균만 보면 멀쩡해 보이기 때문이다.</a:t>
+            </a:r>
+          </a:p>
+          <a:p>
+            <a:r>
+              <a:t> 말할 것: "You cannot staff for a problem whose median is 'no problem.'"</a:t>
+            </a:r>
+          </a:p>
+          <a:p>
+            <a:r>
+              <a:t> "거의 세 배"라고 비율만 말하지 말고 두 숫자를 다 말한다 — $41.9k와 $15.0k.</a:t>
+            </a:r>
+          </a:p>
+          <a:p>
+            <a:r>
+              <a:t> 오른쪽 차트는 슬라이드 그래픽이 아니라 실제 제품 화면 이다. 한 번 언급하면 기술 점수가 조용히 올라간다.</a:t>
+            </a:r>
+          </a:p>
+          <a:p>
+            <a:r>
+              <a:t> 속도: 50초.</a:t>
             </a:r>
           </a:p>
         </p:txBody>
@@ -1517,37 +1467,22 @@
           <a:lstStyle/>
           <a:p>
             <a:r>
-              <a:t>• This is the slide the whole talk is built on. If they remember one thing, it is that the red tick sits to the left of the amber. </a:t>
-            </a:r>
-          </a:p>
-          <a:p>
-            <a:r>
-              <a:t> </a:t>
-            </a:r>
-          </a:p>
-          <a:p>
-            <a:r>
-              <a:t>• Let the bar finish drawing before you speak. The amber block is the last thing to appear — that timing is the argument. </a:t>
-            </a:r>
-          </a:p>
-          <a:p>
-            <a:r>
-              <a:t> </a:t>
-            </a:r>
-          </a:p>
-          <a:p>
-            <a:r>
-              <a:t>• Trace it with your hand: "on duty… driving… he arrives… free time… and here" — tap the red tick — "the next load is already gone. Thirty-seven minutes before anybody's detention timer even starts." </a:t>
-            </a:r>
-          </a:p>
-          <a:p>
-            <a:r>
-              <a:t> </a:t>
-            </a:r>
-          </a:p>
-          <a:p>
-            <a:r>
-              <a:t>• Innovation is 20%. This is where you earn it. Do not rush.</a:t>
+              <a:t>발표 전체가 이 슬라이드 위에 서 있다. 하나만 기억시킨다면 빨간 눈금이 황색보다 왼쪽에 있다 는 것.</a:t>
+            </a:r>
+          </a:p>
+          <a:p>
+            <a:r>
+              <a:t> 막대가 다 그려질 때까지 기다렸다 말한다. 황색이 마지막에 나타나는데, 그 타이밍 자체가 논증이다.</a:t>
+            </a:r>
+          </a:p>
+          <a:p>
+            <a:r>
+              <a:t> 손으로 훑으면서 말할 것: "On duty… driving… he arrives… free time… and here" — (빨간 눈금을 짚으며) — "the next load is already gone. Thirty-seven minutes before anybody's detention timer even starts."</a:t>
+            </a:r>
+          </a:p>
+          <a:p>
+            <a:r>
+              <a:t> Innovation이 20%다. 여기서 벌어들인다. 서두르지 마라.</a:t>
             </a:r>
           </a:p>
         </p:txBody>
@@ -1617,37 +1552,22 @@
           <a:lstStyle/>
           <a:p>
             <a:r>
-              <a:t>• Do not narrate the whole screen. Name three things and move: the map, the ranked board, the road strip underneath. </a:t>
-            </a:r>
-          </a:p>
-          <a:p>
-            <a:r>
-              <a:t> </a:t>
-            </a:r>
-          </a:p>
-          <a:p>
-            <a:r>
-              <a:t>• "Eight trucks. Only one is a problem. It is at the top because it is the most urgent, not because it arrived first." </a:t>
-            </a:r>
-          </a:p>
-          <a:p>
-            <a:r>
-              <a:t> </a:t>
-            </a:r>
-          </a:p>
-          <a:p>
-            <a:r>
-              <a:t>• If the projector is washing out the map, skip straight to the next slide — the numbers there are the point, not the pixels. </a:t>
-            </a:r>
-          </a:p>
-          <a:p>
-            <a:r>
-              <a:t> </a:t>
-            </a:r>
-          </a:p>
-          <a:p>
-            <a:r>
-              <a:t>• This is the natural place to switch to the live app. Decide beforehand: slide 6 or slide 9. Do not decide on stage.</a:t>
+              <a:t>화면 전체를 설명하지 마라. 세 가지만 짚고 넘어간다 — 지도, 순위 보드, 아래 도로 줄.</a:t>
+            </a:r>
+          </a:p>
+          <a:p>
+            <a:r>
+              <a:t> 말할 것: "Eight trucks. Only one is a problem. It is at the top because it is the most urgent, not because it arrived first."</a:t>
+            </a:r>
+          </a:p>
+          <a:p>
+            <a:r>
+              <a:t> 프로젝터에서 지도가 날아가 보이면 바로 다음 슬라이드로 넘어가라. 여기서 중요한 건 숫자지 픽셀이 아니다.</a:t>
+            </a:r>
+          </a:p>
+          <a:p>
+            <a:r>
+              <a:t> 결정: 라이브 앱으로 넘어가는 지점은 6번이나 9번이다. 미리 정해라. 무대에서 정하지 마라.</a:t>
             </a:r>
           </a:p>
         </p:txBody>
@@ -1717,37 +1637,32 @@
           <a:lstStyle/>
           <a:p>
             <a:r>
-              <a:t>• Read the three clocks left to right, then stop. Let the red block do its own work. </a:t>
-            </a:r>
-          </a:p>
-          <a:p>
-            <a:r>
-              <a:t> </a:t>
-            </a:r>
-          </a:p>
-          <a:p>
-            <a:r>
-              <a:t>• The negative margins are the punchline: "minus forty-nine minutes. Even if they release him this second, he cannot make the pickup legally." </a:t>
-            </a:r>
-          </a:p>
-          <a:p>
-            <a:r>
-              <a:t> </a:t>
-            </a:r>
-          </a:p>
-          <a:p>
-            <a:r>
-              <a:t>• "n=9" is deliberate and worth pointing at — we show the sample size behind the prediction rather than hiding a thin one. If a judge asks whether nine is enough: no, and that is why the number is on the screen. </a:t>
-            </a:r>
-          </a:p>
-          <a:p>
-            <a:r>
-              <a:t> </a:t>
-            </a:r>
-          </a:p>
-          <a:p>
-            <a:r>
-              <a:t>• Technical Execution is 20%. This slide plus the packet slide carry it.</a:t>
+              <a:t>세 시계를 왼쪽에서 오른쪽으로 읽고 멈춘다. 빨간 블록이 알아서 일하게 둔다.</a:t>
+            </a:r>
+          </a:p>
+          <a:p>
+            <a:r>
+              <a:t> 음수 여유가 펀치라인이다.</a:t>
+            </a:r>
+          </a:p>
+          <a:p>
+            <a:r>
+              <a:t> 말할 것: "Minus forty-nine minutes. Even if they release him this second, he cannot make the pickup legally."</a:t>
+            </a:r>
+          </a:p>
+          <a:p>
+            <a:r>
+              <a:t> n=9는 일부러 띄운 것 이고 가리킬 값어치가 있다. 표본이 얇으면 얇다고 보여준다.</a:t>
+            </a:r>
+          </a:p>
+          <a:p>
+            <a:r>
+              <a:t> "9개면 충분한가?" 질문이 오면: "No — and that is exactly why the number is on the screen."</a:t>
+            </a:r>
+          </a:p>
+          <a:p>
+            <a:r>
+              <a:t> Technical Execution이 20%다. 이 슬라이드와 증거 패킷 슬라이드가 그걸 짊어진다.</a:t>
             </a:r>
           </a:p>
         </p:txBody>
@@ -1817,27 +1732,22 @@
           <a:lstStyle/>
           <a:p>
             <a:r>
-              <a:t>• The driver app exists because the check-in tap is evidence , not UX garnish. Say that: "this tap is what makes the charge defensible — it is the difference between a claim and an argument." </a:t>
-            </a:r>
-          </a:p>
-          <a:p>
-            <a:r>
-              <a:t> </a:t>
-            </a:r>
-          </a:p>
-          <a:p>
-            <a:r>
-              <a:t>• Best Mobile App is one of the five special awards. Thirty seconds here is cheap. </a:t>
-            </a:r>
-          </a:p>
-          <a:p>
-            <a:r>
-              <a:t> </a:t>
-            </a:r>
-          </a:p>
-          <a:p>
-            <a:r>
-              <a:t>• Do not oversell: read the grey line at the bottom out loud. Claiming ELD certification in front of a fleet operator would be a bad thirty seconds.</a:t>
+              <a:t>기사 앱이 있는 이유는 체크인 탭이 증거이기 때문 이지 UI 장식이 아니다.</a:t>
+            </a:r>
+          </a:p>
+          <a:p>
+            <a:r>
+              <a:t> 말할 것: "This tap is what makes the charge defensible — it is the difference between a claim and an argument."</a:t>
+            </a:r>
+          </a:p>
+          <a:p>
+            <a:r>
+              <a:t> Best Mobile App이 특별상 다섯 개 중 하나다. 여기 30초는 싸게 먹힌다.</a:t>
+            </a:r>
+          </a:p>
+          <a:p>
+            <a:r>
+              <a:t> 과장하지 마라. 맨 아래 회색 줄을 소리 내어 읽어라. 운송사 사람 앞에서 ELD 인증을 주장하면 30초 만에 신뢰를 잃는다.</a:t>
             </a:r>
           </a:p>
         </p:txBody>
@@ -1907,37 +1817,27 @@
           <a:lstStyle/>
           <a:p>
             <a:r>
-              <a:t>• The single biggest risk in the whole presentation. "Failed demo" is the explicit 1-out-of-5 anchor for Presentation &amp; Demo Quality. </a:t>
-            </a:r>
-          </a:p>
-          <a:p>
-            <a:r>
-              <a:t> </a:t>
-            </a:r>
-          </a:p>
-          <a:p>
-            <a:r>
-              <a:t>• Rule for the day: if the live app is not showing what you want within fifteen seconds , hit play on this video and carry on narrating. Never debug on stage. </a:t>
-            </a:r>
-          </a:p>
-          <a:p>
-            <a:r>
-              <a:t> </a:t>
-            </a:r>
-          </a:p>
-          <a:p>
-            <a:r>
-              <a:t>• Warm the tile cache and the simulator before doors close. Have the scenario already at ~11:00. </a:t>
-            </a:r>
-          </a:p>
-          <a:p>
-            <a:r>
-              <a:t> </a:t>
-            </a:r>
-          </a:p>
-          <a:p>
-            <a:r>
-              <a:t>• Budget six to seven minutes here. It is the longest single block; everything before it was setup.</a:t>
+              <a:t>발표 전체에서 가장 큰 위험 구간이다. "실패한 데모"가 Presentation 항목의 1/5점 앵커로 명시돼 있다.</a:t>
+            </a:r>
+          </a:p>
+          <a:p>
+            <a:r>
+              <a:t> 오늘의 규칙: 라이브 앱이 15초 안에 원하는 걸 안 보여주면, 영상을 틀고 설명을 이어간다. </a:t>
+            </a:r>
+          </a:p>
+          <a:p>
+            <a:r>
+              <a:t> 무대에서 디버깅하지 마라. 절대로.</a:t>
+            </a:r>
+          </a:p>
+          <a:p>
+            <a:r>
+              <a:t> 준비: 문 닫히기 전에 타일 캐시와 시뮬레이터를 데워둔다. 시나리오를 미리 11:00 근처에 맞춰둔다.</a:t>
+            </a:r>
+          </a:p>
+          <a:p>
+            <a:r>
+              <a:t> 시간: 6~7분. 가장 긴 구간이고, 앞의 모든 것이 이걸 위한 준비였다.</a:t>
             </a:r>
           </a:p>
         </p:txBody>

--- a/docs/demo/deck/dockrisk-deck.pptx
+++ b/docs/demo/deck/dockrisk-deck.pptx
@@ -517,22 +517,43 @@
           <a:lstStyle/>
           <a:p>
             <a:r>
-              <a:t>차가운 상태로 시작. 슬라이드 아래 막대를 손으로 짚으면서 연다. 40초 안에 끝낸다. 부제는 소리 내어 읽지 말 것.</a:t>
-            </a:r>
-          </a:p>
-          <a:p>
-            <a:r>
-              <a:t> 말할 것: "This is one truck's Sunday. The hatched part is the two hours of free time the contract gives the customer. The amber is money. And this red tick — the one that matters — is the moment the driver's next load became impossible. It happens before the amber starts."</a:t>
-            </a:r>
-          </a:p>
-          <a:p>
-            <a:r>
-              <a:t> 그 다음: "Nobody in city dispatch is watching that red tick. That's the whole talk."</a:t>
-            </a:r>
-          </a:p>
-          <a:p>
-            <a:r>
-              <a:t> 속도: 40초. 여기서 늘어지면 뒤가 밀린다.</a:t>
+              <a:t>0:00–0:40. 차갑게 시작. 사람을 보고 첫 두 문장을 말한 다음 화면으로 넘어간다. 부제는 읽지 않는다. 이 슬라이드의 두 문장은 외운다 — 유일하게 외우는 곳이다.</a:t>
+            </a:r>
+          </a:p>
+          <a:p/>
+          <a:p>
+            <a:r>
+              <a:t>읽을 것 — 아래 영어를 그대로</a:t>
+            </a:r>
+          </a:p>
+          <a:p/>
+          <a:p>
+            <a:r>
+              <a:t>▶ Hi. I'm Junsu.</a:t>
+            </a:r>
+          </a:p>
+          <a:p/>
+          <a:p>
+            <a:r>
+              <a:t>▶ A truck waiting at a dock loses its next load before it earns a detention charge.</a:t>
+            </a:r>
+          </a:p>
+          <a:p/>
+          <a:p>
+            <a:r>
+              <a:t>▶ DockRisk catches that moment. It tells the dispatcher which truck to move.</a:t>
+            </a:r>
+          </a:p>
+          <a:p/>
+          <a:p>
+            <a:r>
+              <a:t>▶ That's the whole idea. Let me show you where it comes from.</a:t>
+            </a:r>
+          </a:p>
+          <a:p/>
+          <a:p>
+            <a:r>
+              <a:t>여기서 늘어지면 뒤가 전부 밀린다. 40초.</a:t>
             </a:r>
           </a:p>
         </p:txBody>
@@ -602,22 +623,55 @@
           <a:lstStyle/>
           <a:p>
             <a:r>
-              <a:t>화면의 금액이 $0.00인 것은 의도적이다. 그냥 넘기지 마라 — 덱에서 가장 강한 슬라이드다.</a:t>
-            </a:r>
-          </a:p>
-          <a:p>
-            <a:r>
-              <a:t> 말할 것: "This stop did not earn a charge, and the packet says why. A tool that only shows you the wins is a tool nobody trusts on Monday."</a:t>
-            </a:r>
-          </a:p>
-          <a:p>
-            <a:r>
-              <a:t> 빨간 검토 블록도 같은 생각이다. 도시 중심점으로 추정한 시설에 대해서는 시스템이 청구를 거부하고 이유를 말한다. </a:t>
-            </a:r>
-          </a:p>
-          <a:p>
-            <a:r>
-              <a:t> 심사위원 중에 운송사 운영자가 있으면 이 슬라이드를 물어본다. 물어보게 둬라.</a:t>
+              <a:t>11:00–11:40. 화면의 금액이 $0.00인 것은 의도적이다. 그냥 넘기지 마라 — 덱에서 가장 강한 슬라이드다.</a:t>
+            </a:r>
+          </a:p>
+          <a:p/>
+          <a:p>
+            <a:r>
+              <a:t>읽을 것 — 아래 영어를 그대로</a:t>
+            </a:r>
+          </a:p>
+          <a:p/>
+          <a:p>
+            <a:r>
+              <a:t>▶ Here is what sits behind that amount.</a:t>
+            </a:r>
+          </a:p>
+          <a:p/>
+          <a:p>
+            <a:r>
+              <a:t>▶ The calculation. The timeline. And who reported each event — the system, or the driver.</a:t>
+            </a:r>
+          </a:p>
+          <a:p/>
+          <a:p>
+            <a:r>
+              <a:t>▶ This one is zero dollars. The stop did not earn a charge, and the packet says why.</a:t>
+            </a:r>
+          </a:p>
+          <a:p/>
+          <a:p>
+            <a:r>
+              <a:t>▶ A tool that only shows you the wins is a tool nobody trusts on Monday.</a:t>
+            </a:r>
+          </a:p>
+          <a:p/>
+          <a:p>
+            <a:r>
+              <a:t>▶ And this red block is the same idea. This facility was placed from a city centroid, so the system refuses to bill it and tells you that.</a:t>
+            </a:r>
+          </a:p>
+          <a:p/>
+          <a:p>
+            <a:r>
+              <a:t>▶ We compute the amount automatically. We never bill automatically. A person presses the button.</a:t>
+            </a:r>
+          </a:p>
+          <a:p/>
+          <a:p>
+            <a:r>
+              <a:t>심사위원 중에 운송사 운영자가 있으면 이 슬라이드를 물어본다. 물어보게 둬라.</a:t>
             </a:r>
           </a:p>
         </p:txBody>
@@ -687,22 +741,49 @@
           <a:lstStyle/>
           <a:p>
             <a:r>
-              <a:t>Best Use of AI는 특별상인데, 정직한 프레이밍이 더 큰 모델보다 자주 이긴다. </a:t>
-            </a:r>
-          </a:p>
-          <a:p>
-            <a:r>
-              <a:t> 규칙을 평범하게 말할 것: "The model reads and writes. It never counts."</a:t>
-            </a:r>
-          </a:p>
-          <a:p>
-            <a:r>
-              <a:t> 심사위원은 오늘 하루 LLM이 자신만만하게 금액을 지어내는 데모를 여섯 번쯤 봤다.</a:t>
-            </a:r>
-          </a:p>
-          <a:p>
-            <a:r>
-              <a:t> 전송 전 확인 목록을 가리켜라. 시스템이 자기 초안을 스스로 반박하고 있다 — 그 디테일이 10초 값어치를 한다.</a:t>
+              <a:t>11:40–12:10. Best Use of AI는 특별상인데, 정직한 프레이밍이 더 큰 모델보다 자주 이긴다. 심사위원은 오늘 LLM이 자신만만하게 금액을 지어내는 데모를 여섯 번쯤 봤다.</a:t>
+            </a:r>
+          </a:p>
+          <a:p/>
+          <a:p>
+            <a:r>
+              <a:t>읽을 것 — 아래 영어를 그대로</a:t>
+            </a:r>
+          </a:p>
+          <a:p/>
+          <a:p>
+            <a:r>
+              <a:t>▶ There are exactly two places we use a model, and both are labelled in the product.</a:t>
+            </a:r>
+          </a:p>
+          <a:p/>
+          <a:p>
+            <a:r>
+              <a:t>▶ One reads a rate confirmation and pulls out the terms. It shows the sentence it used, so you check the contract, not the model.</a:t>
+            </a:r>
+          </a:p>
+          <a:p/>
+          <a:p>
+            <a:r>
+              <a:t>▶ The other drafts the customer notice, and then checks its own draft against the packet before anyone can send it.</a:t>
+            </a:r>
+          </a:p>
+          <a:p/>
+          <a:p>
+            <a:r>
+              <a:t>▶ The rule is one line. The model reads and writes. It never counts.</a:t>
+            </a:r>
+          </a:p>
+          <a:p/>
+          <a:p>
+            <a:r>
+              <a:t>▶ Rules do the law and the money. Both paths keep working with the model switched off.</a:t>
+            </a:r>
+          </a:p>
+          <a:p/>
+          <a:p>
+            <a:r>
+              <a:t>전송 전 확인 목록을 가리켜라. 시스템이 자기 초안을 스스로 반박하고 있다 — 10초 값어치 한다.</a:t>
             </a:r>
           </a:p>
         </p:txBody>
@@ -772,17 +853,48 @@
           <a:lstStyle/>
           <a:p>
             <a:r>
-              <a:t>조용한 슬라이드인데, "우리 계약은 다 다르다" 는 뻔한 반론을 누가 말하기 전에 답한다.</a:t>
-            </a:r>
-          </a:p>
-          <a:p>
-            <a:r>
-              <a:t> 225 대 32 분할은 추출본에서 나온 실제 숫자 다. 논증보다 이게 더 잘 증명한다.</a:t>
-            </a:r>
-          </a:p>
-          <a:p>
-            <a:r>
-              <a:t> 속도: 40초. 시간이 밀리면 제일 먼저 잘라낼 슬라이드가 이것이다.</a:t>
+              <a:t>12:10–12:35. 조용한 슬라이드인데 "우리 계약은 다 다르다"는 반론을 누가 말하기 전에 답한다.</a:t>
+            </a:r>
+          </a:p>
+          <a:p>
+            <a:r>
+              <a:t>시간이 밀리면 제일 먼저 잘라낼 슬라이드가 이것이다.</a:t>
+            </a:r>
+          </a:p>
+          <a:p/>
+          <a:p>
+            <a:r>
+              <a:t>읽을 것 — 아래 영어를 그대로</a:t>
+            </a:r>
+          </a:p>
+          <a:p/>
+          <a:p>
+            <a:r>
+              <a:t>▶ Detention terms are different for every customer. So we made them data, not code.</a:t>
+            </a:r>
+          </a:p>
+          <a:p/>
+          <a:p>
+            <a:r>
+              <a:t>▶ Free time, rate, increment, when the clock starts.</a:t>
+            </a:r>
+          </a:p>
+          <a:p/>
+          <a:p>
+            <a:r>
+              <a:t>▶ Two hundred and twenty-five of the stops in your export fall under one set of terms. Thirty-two fall under another.</a:t>
+            </a:r>
+          </a:p>
+          <a:p/>
+          <a:p>
+            <a:r>
+              <a:t>▶ Change the terms, and every charge behind them recomputes. Nobody edits a rule file.</a:t>
+            </a:r>
+          </a:p>
+          <a:p/>
+          <a:p>
+            <a:r>
+              <a:t>225 대 32 분할은 추출본에서 나온 실제 숫자 다. 논증보다 이게 더 잘 증명한다.</a:t>
             </a:r>
           </a:p>
         </p:txBody>
@@ -852,32 +964,54 @@
           <a:lstStyle/>
           <a:p>
             <a:r>
-              <a:t>직관에 반하지만 이 슬라이드가 점수를 번다. 심사위원은 하루 종일 "다 됩니다"를 들었다.</a:t>
-            </a:r>
-          </a:p>
-          <a:p>
-            <a:r>
-              <a:t> 안 되는 것 세 가지를 이름 붙여 말하는 게 가장 빠른 신뢰 다.</a:t>
-            </a:r>
-          </a:p>
-          <a:p>
-            <a:r>
-              <a:t> 하나만 말한다면 철회 이야기를 해라.</a:t>
-            </a:r>
-          </a:p>
-          <a:p>
-            <a:r>
-              <a:t> 말할 것: "We found a bug in their data, we were wrong, and we wrote down that we were wrong."</a:t>
-            </a:r>
-          </a:p>
-          <a:p>
-            <a:r>
-              <a:t> 그게 브리프가 채점 항목으로 적어둔 Problem Discovery다.</a:t>
-            </a:r>
-          </a:p>
-          <a:p>
-            <a:r>
-              <a:t> 사과하는 투로 말하지 마라. 공학적 규율로 전달해라. 실제로 그렇기 때문이다.</a:t>
+              <a:t>12:35–13:10. 직관에 반하지만 이 슬라이드가 점수를 번다. 심사위원은 하루 종일 "다 됩니다"를 들었다. 안 되는 것 세 가지를 이름 붙여 말하는 게 가장 빠른 신뢰다.</a:t>
+            </a:r>
+          </a:p>
+          <a:p/>
+          <a:p>
+            <a:r>
+              <a:t>읽을 것 — 아래 영어를 그대로</a:t>
+            </a:r>
+          </a:p>
+          <a:p/>
+          <a:p>
+            <a:r>
+              <a:t>▶ Here is what we did not build, on purpose.</a:t>
+            </a:r>
+          </a:p>
+          <a:p/>
+          <a:p>
+            <a:r>
+              <a:t>▶ Axle weight. Your truck sheet has one weight column. There is nothing to compute a load plan from, so we did not pretend.</a:t>
+            </a:r>
+          </a:p>
+          <a:p/>
+          <a:p>
+            <a:r>
+              <a:t>▶ We do not report revenue. The export has no rates.</a:t>
+            </a:r>
+          </a:p>
+          <a:p/>
+          <a:p>
+            <a:r>
+              <a:t>▶ And stops over six hours never bill themselves. Forty-nine of those stops carry two thirds of all the detention hours in the file.</a:t>
+            </a:r>
+          </a:p>
+          <a:p/>
+          <a:p>
+            <a:r>
+              <a:t>▶ We also found a bug in our own reading of your data. We were wrong about it, we fixed it, and we wrote down that we were wrong. It is in the repo.</a:t>
+            </a:r>
+          </a:p>
+          <a:p/>
+          <a:p>
+            <a:r>
+              <a:t>하나만 말한다면 철회 이야기 를 해라. 그게 브리프가 채점 항목으로 적어둔 Problem Discovery다.</a:t>
+            </a:r>
+          </a:p>
+          <a:p>
+            <a:r>
+              <a:t>사과하는 투로 말하지 마라. 공학적 규율로 전달해라 — 실제로 그렇기 때문이다.</a:t>
             </a:r>
           </a:p>
         </p:txBody>
@@ -947,22 +1081,37 @@
           <a:lstStyle/>
           <a:p>
             <a:r>
-              <a:t>Use of Provided Data &amp; APIs가 15%인데 이 슬라이드가 그 전부 다.</a:t>
-            </a:r>
-          </a:p>
-          <a:p>
-            <a:r>
-              <a:t> 시간 아끼려고 건너뛰지 마라 — 대신 12번을 잘라라. </a:t>
-            </a:r>
-          </a:p>
-          <a:p>
-            <a:r>
-              <a:t> "satellite toggle"을 명시적으로 말해라. 브리프가 두 번 적어놨다. 누군가의 체크리스트에 있다는 뜻이다.</a:t>
-            </a:r>
-          </a:p>
-          <a:p>
-            <a:r>
-              <a:t> 마지막 줄이 논증이다 — 보너스 질문은 우리에게 부록이 아니라 제품이 존재하는 이유 였다.</a:t>
+              <a:t>13:10–13:40. Use of Provided Data &amp; APIs가 15%인데 이 슬라이드가 그 전부다. 시간 아끼려고 건너뛰지 마라 — 대신 12번을 잘라라.</a:t>
+            </a:r>
+          </a:p>
+          <a:p/>
+          <a:p>
+            <a:r>
+              <a:t>읽을 것 — 아래 영어를 그대로</a:t>
+            </a:r>
+          </a:p>
+          <a:p/>
+          <a:p>
+            <a:r>
+              <a:t>▶ Everything the brief asked for is in here, and it is all running on your data.</a:t>
+            </a:r>
+          </a:p>
+          <a:p/>
+          <a:p>
+            <a:r>
+              <a:t>▶ The four exports. The road API. The map, with the satellite toggle.</a:t>
+            </a:r>
+          </a:p>
+          <a:p/>
+          <a:p>
+            <a:r>
+              <a:t>▶ And the bonus question — how one delay changes the rest of the day — was not an appendix for us. It is the reason the product exists.</a:t>
+            </a:r>
+          </a:p>
+          <a:p/>
+          <a:p>
+            <a:r>
+              <a:t>"satellite toggle"을 명시적으로 말해라. 브리프가 두 번 적어놨다 — 누군가의 체크리스트에 있다는 뜻이다.</a:t>
             </a:r>
           </a:p>
         </p:txBody>
@@ -1032,17 +1181,43 @@
           <a:lstStyle/>
           <a:p>
             <a:r>
-              <a:t>빠르게 지나간다 — 30초. 기술 스택 나열은 그 자체로는 아무것도 못 번다. 오른쪽 두 상자가 번다.</a:t>
-            </a:r>
-          </a:p>
-          <a:p>
-            <a:r>
-              <a:t> 이 두 문장은 꼭 말할 것: "It survives an API restart." / "It is deterministic from a seed."</a:t>
-            </a:r>
-          </a:p>
-          <a:p>
-            <a:r>
-              <a:t> "왜 시뮬레이터를 따로 뒀나?" 질문이 오면: "The brief requires it — and it is the only honest way to demo a historical export where every leg is already finished."</a:t>
+              <a:t>13:40–14:00. 빠르게 지나간다. 기술 스택 나열은 그 자체로는 아무것도 못 번다. 오른쪽 두 상자가 번다.</a:t>
+            </a:r>
+          </a:p>
+          <a:p/>
+          <a:p>
+            <a:r>
+              <a:t>읽을 것 — 아래 영어를 그대로</a:t>
+            </a:r>
+          </a:p>
+          <a:p/>
+          <a:p>
+            <a:r>
+              <a:t>▶ Three services and one clock.</a:t>
+            </a:r>
+          </a:p>
+          <a:p/>
+          <a:p>
+            <a:r>
+              <a:t>▶ It survives an API restart.</a:t>
+            </a:r>
+          </a:p>
+          <a:p/>
+          <a:p>
+            <a:r>
+              <a:t>▶ It is deterministic from a seed — same seed, same replay, every time.</a:t>
+            </a:r>
+          </a:p>
+          <a:p/>
+          <a:p>
+            <a:r>
+              <a:t>▶ And except for the live road call and street map tiles, all of this runs on a laptop with no network.</a:t>
+            </a:r>
+          </a:p>
+          <a:p/>
+          <a:p>
+            <a:r>
+              <a:t>"왜 시뮬레이터를 따로 뒀나?" — "The brief requires it, and it is the only honest way to demo a historical export where every leg is already finished."</a:t>
             </a:r>
           </a:p>
         </p:txBody>
@@ -1112,32 +1287,68 @@
           <a:lstStyle/>
           <a:p>
             <a:r>
-              <a:t>문장으로 끝낸다. "질문 있나요?"로 끝내지 마라. 말하고, 빨간 눈금을 짚고, 입을 다문다.</a:t>
-            </a:r>
-          </a:p>
-          <a:p>
-            <a:r>
-              <a:t> 이 슬라이드를 Q&amp;A 내내 띄워둔다 — 심사위원이 적는 동안 URL이 화면에 남아 있게.</a:t>
-            </a:r>
-          </a:p>
-          <a:p>
-            <a:r>
-              <a:t> 예상 질문과 답: </a:t>
-            </a:r>
-          </a:p>
-          <a:p>
-            <a:r>
-              <a:t> "Why not just use the TMS?" — "It computes after the fact, from timestamps nobody enters."</a:t>
-            </a:r>
-          </a:p>
-          <a:p>
-            <a:r>
-              <a:t> "How do you know the dwell prediction generalises?" — "We do not, past n=9 per city. That is why n is on the screen."</a:t>
-            </a:r>
-          </a:p>
-          <a:p>
-            <a:r>
-              <a:t> "What would you build next?" — "Verified dock geometry, then the appointment renegotiation the desk currently does by phone."</a:t>
+              <a:t>14:00–14:20. 문장으로 끝낸다. "질문 있나요?"로 끝내지 마라. 말하고, 빨간 눈금을 짚고, 입을 다문다.</a:t>
+            </a:r>
+          </a:p>
+          <a:p>
+            <a:r>
+              <a:t>이 슬라이드를 Q&amp;A 내내 띄워둔다 — 심사위원이 적는 동안 URL이 화면에 남아 있게.</a:t>
+            </a:r>
+          </a:p>
+          <a:p/>
+          <a:p>
+            <a:r>
+              <a:t>읽을 것 — 아래 영어를 그대로</a:t>
+            </a:r>
+          </a:p>
+          <a:p/>
+          <a:p>
+            <a:r>
+              <a:t>▶ So that is DockRisk.</a:t>
+            </a:r>
+          </a:p>
+          <a:p/>
+          <a:p>
+            <a:r>
+              <a:t>▶ One dock delay becomes three things. A charge with its evidence. A forward check on the next load. And a driver who can still take it.</a:t>
+            </a:r>
+          </a:p>
+          <a:p/>
+          <a:p>
+            <a:r>
+              <a:t>▶ Watch the clock that runs out first.</a:t>
+            </a:r>
+          </a:p>
+          <a:p/>
+          <a:p>
+            <a:r>
+              <a:t>▶ Thank you.</a:t>
+            </a:r>
+          </a:p>
+          <a:p/>
+          <a:p>
+            <a:r>
+              <a:t>예상 질문:</a:t>
+            </a:r>
+          </a:p>
+          <a:p>
+            <a:r>
+              <a:t>"Why not just use the TMS?" — "It computes after the fact, from timestamps nobody enters."</a:t>
+            </a:r>
+          </a:p>
+          <a:p>
+            <a:r>
+              <a:t>"Does the dwell prediction generalise?" — "We do not know, past nine stops a city. That is why n is on the screen."</a:t>
+            </a:r>
+          </a:p>
+          <a:p>
+            <a:r>
+              <a:t>"Is that money you can actually collect?" — "No. It is exposure. Contract eligibility and real rates are not in this file."</a:t>
+            </a:r>
+          </a:p>
+          <a:p>
+            <a:r>
+              <a:t>"What would you build next?" — "Backhaul. Thirty-five percent of legs run empty, but only twelve percent of the distance."</a:t>
             </a:r>
           </a:p>
         </p:txBody>
@@ -1207,22 +1418,43 @@
           <a:lstStyle/>
           <a:p>
             <a:r>
-              <a:t>비대칭을 꽂는 게 목적이다. 보이는 손실은 회계 문제, 안 보이는 손실은 운영 문제다. 아직 안 풀린 건 두 번째뿐.</a:t>
-            </a:r>
-          </a:p>
-          <a:p>
-            <a:r>
-              <a:t> 마지막 줄은 주최측 브리프의 보너스 질문을 그대로 인용한 것 이다. 그걸 소리 내어 말하면 신뢰가 생긴다.</a:t>
-            </a:r>
-          </a:p>
-          <a:p>
-            <a:r>
-              <a:t> 말할 것: "This is your question, not ours."</a:t>
-            </a:r>
-          </a:p>
-          <a:p>
-            <a:r>
-              <a:t> 속도: 60초. 오래 끌지 말 것 — 설득은 다음 숫자 슬라이드가 한다.</a:t>
+              <a:t>0:40–1:30. 비대칭이 목적이다. 보이는 손실은 회계 문제, 안 보이는 손실은 운영 문제. 마지막 줄은 주최측 브리프의 보너스 질문을 그대로 인용 한 것이다.</a:t>
+            </a:r>
+          </a:p>
+          <a:p/>
+          <a:p>
+            <a:r>
+              <a:t>읽을 것 — 아래 영어를 그대로</a:t>
+            </a:r>
+          </a:p>
+          <a:p/>
+          <a:p>
+            <a:r>
+              <a:t>▶ A dock delay costs a city desk twice.</a:t>
+            </a:r>
+          </a:p>
+          <a:p/>
+          <a:p>
+            <a:r>
+              <a:t>▶ The first cost is detention. Somebody can see it, because there is a number on an invoice.</a:t>
+            </a:r>
+          </a:p>
+          <a:p/>
+          <a:p>
+            <a:r>
+              <a:t>▶ The second cost is the load the driver can no longer legally take. Nobody sees that one. It never becomes a line item.</a:t>
+            </a:r>
+          </a:p>
+          <a:p/>
+          <a:p>
+            <a:r>
+              <a:t>▶ Your own brief asks how a delay at one stop changes the rest of the day. That is your question, not ours. This is our answer.</a:t>
+            </a:r>
+          </a:p>
+          <a:p/>
+          <a:p>
+            <a:r>
+              <a:t>설득은 다음 숫자 슬라이드가 한다. 여기서 오래 끌지 말 것.</a:t>
             </a:r>
           </a:p>
         </p:txBody>
@@ -1292,22 +1524,48 @@
           <a:lstStyle/>
           <a:p>
             <a:r>
-              <a:t>Industry Impact 슬라이드다. 25%로 배점이 가장 크다. 여기서 속도를 늦춘다. $31k를 손으로 가리킨다.</a:t>
-            </a:r>
-          </a:p>
-          <a:p>
-            <a:r>
-              <a:t> 말할 것: "That is one month, one mid-size carrier, from your file."</a:t>
-            </a:r>
-          </a:p>
-          <a:p>
-            <a:r>
-              <a:t> 마지막 문단이 핵심이다. 현장 운송사 임원은 unbilled 대신 exposure 라고 말하는지로 채점한다. 그 구분을 소리 내어 말하면 "데이터를 읽었다"는 신호가 된다.</a:t>
-            </a:r>
-          </a:p>
-          <a:p>
-            <a:r>
-              <a:t> "79% 정확도면 좋은 건가?" 질문이 오면: "A false positive costs a dispatcher one glance. A false negative costs the charge and the load."</a:t>
+              <a:t>1:30–2:30. Use of Provided Data가 15%, Industry Impact가 25%. 가장 크게 버는 구간이다. 속도를 늦춘다. $31k를 손으로 짚는다.</a:t>
+            </a:r>
+          </a:p>
+          <a:p/>
+          <a:p>
+            <a:r>
+              <a:t>읽을 것 — 아래 영어를 그대로</a:t>
+            </a:r>
+          </a:p>
+          <a:p/>
+          <a:p>
+            <a:r>
+              <a:t>▶ This is your file. Fifty-six days. Thirty-nine hundred orders. Every stop replayed through our rules.</a:t>
+            </a:r>
+          </a:p>
+          <a:p/>
+          <a:p>
+            <a:r>
+              <a:t>▶ Thirty-two to forty-three thousand dollars a month of detention exposure.</a:t>
+            </a:r>
+          </a:p>
+          <a:p/>
+          <a:p>
+            <a:r>
+              <a:t>▶ I want to be careful with that word. This is exposure. It is not money you can collect.</a:t>
+            </a:r>
+          </a:p>
+          <a:p/>
+          <a:p>
+            <a:r>
+              <a:t>▶ The export has no billing records and no rates. So we do not call it unbilled revenue, and we do not put a recovery number on a slide.</a:t>
+            </a:r>
+          </a:p>
+          <a:p/>
+          <a:p>
+            <a:r>
+              <a:t>운송사 임원은 unbilled 대신 exposure 라고 말하는지로 채점한다. 그 구분을 소리 내면 "데이터를 읽었다"는 신호가 된다.</a:t>
+            </a:r>
+          </a:p>
+          <a:p>
+            <a:r>
+              <a:t>"79% 정확도면 충분한가?" — "A false positive costs a dispatcher one glance. A false negative costs the charge and the load."</a:t>
             </a:r>
           </a:p>
         </p:txBody>
@@ -1377,27 +1635,49 @@
           <a:lstStyle/>
           <a:p>
             <a:r>
-              <a:t>이 슬라이드의 목적은 왜 아무도 이걸 이미 풀지 않았나 다. 평균만 보면 멀쩡해 보이기 때문이다.</a:t>
-            </a:r>
-          </a:p>
-          <a:p>
-            <a:r>
-              <a:t> 말할 것: "You cannot staff for a problem whose median is 'no problem.'"</a:t>
-            </a:r>
-          </a:p>
-          <a:p>
-            <a:r>
-              <a:t> "거의 세 배"라고 비율만 말하지 말고 두 숫자를 다 말한다 — $41.9k와 $15.0k.</a:t>
-            </a:r>
-          </a:p>
-          <a:p>
-            <a:r>
-              <a:t> 오른쪽 차트는 슬라이드 그래픽이 아니라 실제 제품 화면 이다. 한 번 언급하면 기술 점수가 조용히 올라간다.</a:t>
-            </a:r>
-          </a:p>
-          <a:p>
-            <a:r>
-              <a:t> 속도: 50초.</a:t>
+              <a:t>2:30–3:10. 이 슬라이드의 목적은 왜 아직 아무도 이걸 안 풀었나 다. 평균만 보면 멀쩡해 보이기 때문이다. 오른쪽 차트는 슬라이드 그래픽이 아니라 실제 제품 화면 이다 — 한 번 말하면 기술 점수가 조용히 오른다.</a:t>
+            </a:r>
+          </a:p>
+          <a:p/>
+          <a:p>
+            <a:r>
+              <a:t>읽을 것 — 아래 영어를 그대로</a:t>
+            </a:r>
+          </a:p>
+          <a:p/>
+          <a:p>
+            <a:r>
+              <a:t>▶ Look at this chart. Most waits end inside an hour. The median stop is not a problem.</a:t>
+            </a:r>
+          </a:p>
+          <a:p/>
+          <a:p>
+            <a:r>
+              <a:t>▶ The money is in the thin tail, on the right of the free-time line.</a:t>
+            </a:r>
+          </a:p>
+          <a:p/>
+          <a:p>
+            <a:r>
+              <a:t>▶ And the tail is bursty. The worst month is forty-one thousand nine hundred. The quietest is fifteen thousand.</a:t>
+            </a:r>
+          </a:p>
+          <a:p/>
+          <a:p>
+            <a:r>
+              <a:t>▶ You cannot staff for a problem whose median is no problem. That is why it is still open.</a:t>
+            </a:r>
+          </a:p>
+          <a:p/>
+          <a:p>
+            <a:r>
+              <a:t>▶ That tail is also exactly what manual logging misses. Nobody writes down a two-hour wait while they are sitting in it.</a:t>
+            </a:r>
+          </a:p>
+          <a:p/>
+          <a:p>
+            <a:r>
+              <a:t>비율만 말하지 말고 두 숫자를 다 말한다 — $41.9k와 $15.0k.</a:t>
             </a:r>
           </a:p>
         </p:txBody>
@@ -1467,22 +1747,61 @@
           <a:lstStyle/>
           <a:p>
             <a:r>
-              <a:t>발표 전체가 이 슬라이드 위에 서 있다. 하나만 기억시킨다면 빨간 눈금이 황색보다 왼쪽에 있다 는 것.</a:t>
-            </a:r>
-          </a:p>
-          <a:p>
-            <a:r>
-              <a:t> 막대가 다 그려질 때까지 기다렸다 말한다. 황색이 마지막에 나타나는데, 그 타이밍 자체가 논증이다.</a:t>
-            </a:r>
-          </a:p>
-          <a:p>
-            <a:r>
-              <a:t> 손으로 훑으면서 말할 것: "On duty… driving… he arrives… free time… and here" — (빨간 눈금을 짚으며) — "the next load is already gone. Thirty-seven minutes before anybody's detention timer even starts."</a:t>
-            </a:r>
-          </a:p>
-          <a:p>
-            <a:r>
-              <a:t> Innovation이 20%다. 여기서 벌어들인다. 서두르지 마라.</a:t>
+              <a:t>3:10–4:00. 발표 전체가 이 슬라이드 위에 서 있다. 막대가 다 그려질 때까지 기다렸다 말한다. 황색이 마지막에 나타나는데 그 타이밍 자체가 논증이다. 손으로 왼쪽에서 오른쪽으로 훑는다.</a:t>
+            </a:r>
+          </a:p>
+          <a:p/>
+          <a:p>
+            <a:r>
+              <a:t>읽을 것 — 아래 영어를 그대로</a:t>
+            </a:r>
+          </a:p>
+          <a:p/>
+          <a:p>
+            <a:r>
+              <a:t>▶ This bar is one driver's day, on a time axis.</a:t>
+            </a:r>
+          </a:p>
+          <a:p/>
+          <a:p>
+            <a:r>
+              <a:t>▶ Black is driving. Grey is on duty. The hatched part is the two free hours the contract gives the customer.</a:t>
+            </a:r>
+          </a:p>
+          <a:p/>
+          <a:p>
+            <a:r>
+              <a:t>▶ After the hatch, amber. Amber is money.</a:t>
+            </a:r>
+          </a:p>
+          <a:p/>
+          <a:p>
+            <a:r>
+              <a:t>▶ And this red tick is the moment he must stop driving by law.</a:t>
+            </a:r>
+          </a:p>
+          <a:p/>
+          <a:p>
+            <a:r>
+              <a:t>▶ Now look at the order. The red tick comes first. Thirty-seven minutes before anybody's detention timer even starts.</a:t>
+            </a:r>
+          </a:p>
+          <a:p/>
+          <a:p>
+            <a:r>
+              <a:t>▶ That is the problem. He loses the next load before the charge exists.</a:t>
+            </a:r>
+          </a:p>
+          <a:p/>
+          <a:p>
+            <a:r>
+              <a:t>▶ Nobody in city dispatch is watching that red tick. That is the whole talk.</a:t>
+            </a:r>
+          </a:p>
+          <a:p/>
+          <a:p>
+            <a:r>
+              <a:t>Innovation 20%를 여기서 번다. 절대 서두르지 마라. 하나만 기억시킨다면 빨간 눈금이 황색보다 왼쪽에 있다 는 것.</a:t>
             </a:r>
           </a:p>
         </p:txBody>
@@ -1552,22 +1871,54 @@
           <a:lstStyle/>
           <a:p>
             <a:r>
-              <a:t>화면 전체를 설명하지 마라. 세 가지만 짚고 넘어간다 — 지도, 순위 보드, 아래 도로 줄.</a:t>
-            </a:r>
-          </a:p>
-          <a:p>
-            <a:r>
-              <a:t> 말할 것: "Eight trucks. Only one is a problem. It is at the top because it is the most urgent, not because it arrived first."</a:t>
-            </a:r>
-          </a:p>
-          <a:p>
-            <a:r>
-              <a:t> 프로젝터에서 지도가 날아가 보이면 바로 다음 슬라이드로 넘어가라. 여기서 중요한 건 숫자지 픽셀이 아니다.</a:t>
-            </a:r>
-          </a:p>
-          <a:p>
-            <a:r>
-              <a:t> 결정: 라이브 앱으로 넘어가는 지점은 6번이나 9번이다. 미리 정해라. 무대에서 정하지 마라.</a:t>
+              <a:t>4:00–4:40. 화면 전체를 설명하지 마라. 세 가지만 짚는다 — 지도, 순위 보드, 아래 도로 줄.</a:t>
+            </a:r>
+          </a:p>
+          <a:p/>
+          <a:p>
+            <a:r>
+              <a:t>읽을 것 — 아래 영어를 그대로</a:t>
+            </a:r>
+          </a:p>
+          <a:p/>
+          <a:p>
+            <a:r>
+              <a:t>▶ This is the dispatcher's desk.</a:t>
+            </a:r>
+          </a:p>
+          <a:p/>
+          <a:p>
+            <a:r>
+              <a:t>▶ Eight trucks, ranked by which one becomes a problem first.</a:t>
+            </a:r>
+          </a:p>
+          <a:p/>
+          <a:p>
+            <a:r>
+              <a:t>▶ Only the top row is open. If everything is open, nothing is urgent.</a:t>
+            </a:r>
+          </a:p>
+          <a:p/>
+          <a:p>
+            <a:r>
+              <a:t>▶ It is at the top because it is the most urgent, not because it arrived first.</a:t>
+            </a:r>
+          </a:p>
+          <a:p/>
+          <a:p>
+            <a:r>
+              <a:t>▶ And this line at the bottom is live road data. A closure on the four-oh-one adds road time to the same check.</a:t>
+            </a:r>
+          </a:p>
+          <a:p/>
+          <a:p>
+            <a:r>
+              <a:t>프로젝터에서 지도가 날아가 보이면 바로 다음으로 넘어가라. 중요한 건 숫자지 픽셀이 아니다.</a:t>
+            </a:r>
+          </a:p>
+          <a:p>
+            <a:r>
+              <a:t>라이브 앱으로 넘어가는 지점은 6번 아니면 9번. 미리 정해라. 무대에서 정하지 마라.</a:t>
             </a:r>
           </a:p>
         </p:txBody>
@@ -1637,32 +1988,54 @@
           <a:lstStyle/>
           <a:p>
             <a:r>
-              <a:t>세 시계를 왼쪽에서 오른쪽으로 읽고 멈춘다. 빨간 블록이 알아서 일하게 둔다.</a:t>
-            </a:r>
-          </a:p>
-          <a:p>
-            <a:r>
-              <a:t> 음수 여유가 펀치라인이다.</a:t>
-            </a:r>
-          </a:p>
-          <a:p>
-            <a:r>
-              <a:t> 말할 것: "Minus forty-nine minutes. Even if they release him this second, he cannot make the pickup legally."</a:t>
-            </a:r>
-          </a:p>
-          <a:p>
-            <a:r>
-              <a:t> n=9는 일부러 띄운 것 이고 가리킬 값어치가 있다. 표본이 얇으면 얇다고 보여준다.</a:t>
-            </a:r>
-          </a:p>
-          <a:p>
-            <a:r>
-              <a:t> "9개면 충분한가?" 질문이 오면: "No — and that is exactly why the number is on the screen."</a:t>
-            </a:r>
-          </a:p>
-          <a:p>
-            <a:r>
-              <a:t> Technical Execution이 20%다. 이 슬라이드와 증거 패킷 슬라이드가 그걸 짊어진다.</a:t>
+              <a:t>4:40–5:20. 세 시계를 왼쪽에서 오른쪽으로 읽고 멈춘다. 빨간 블록이 알아서 일하게 둔다. 음수 여유가 펀치라인이다.</a:t>
+            </a:r>
+          </a:p>
+          <a:p/>
+          <a:p>
+            <a:r>
+              <a:t>읽을 것 — 아래 영어를 그대로</a:t>
+            </a:r>
+          </a:p>
+          <a:p/>
+          <a:p>
+            <a:r>
+              <a:t>▶ Here is one truck. Driver eighty-four, at a London dock, waiting since nine twenty-five.</a:t>
+            </a:r>
+          </a:p>
+          <a:p/>
+          <a:p>
+            <a:r>
+              <a:t>▶ Three clocks. Driving hours. On-duty hours. And the detention clock.</a:t>
+            </a:r>
+          </a:p>
+          <a:p/>
+          <a:p>
+            <a:r>
+              <a:t>▶ Minus forty-nine minutes. Even if they release him this second, he cannot make the next pickup legally.</a:t>
+            </a:r>
+          </a:p>
+          <a:p/>
+          <a:p>
+            <a:r>
+              <a:t>▶ So the product does not say at risk. It says what to do. Reassign this load now — and the load number is right there.</a:t>
+            </a:r>
+          </a:p>
+          <a:p/>
+          <a:p>
+            <a:r>
+              <a:t>▶ Underneath, it says why it thinks so, and how sure it is. Nine stops of history for this city. We print the nine.</a:t>
+            </a:r>
+          </a:p>
+          <a:p/>
+          <a:p>
+            <a:r>
+              <a:t>n=9는 일부러 띄운 것 이고 가리킬 값어치가 있다.</a:t>
+            </a:r>
+          </a:p>
+          <a:p>
+            <a:r>
+              <a:t>"9개면 충분한가?" — "No — and that is exactly why the number is on the screen."</a:t>
             </a:r>
           </a:p>
         </p:txBody>
@@ -1732,22 +2105,55 @@
           <a:lstStyle/>
           <a:p>
             <a:r>
-              <a:t>기사 앱이 있는 이유는 체크인 탭이 증거이기 때문 이지 UI 장식이 아니다.</a:t>
-            </a:r>
-          </a:p>
-          <a:p>
-            <a:r>
-              <a:t> 말할 것: "This tap is what makes the charge defensible — it is the difference between a claim and an argument."</a:t>
-            </a:r>
-          </a:p>
-          <a:p>
-            <a:r>
-              <a:t> Best Mobile App이 특별상 다섯 개 중 하나다. 여기 30초는 싸게 먹힌다.</a:t>
-            </a:r>
-          </a:p>
-          <a:p>
-            <a:r>
-              <a:t> 과장하지 마라. 맨 아래 회색 줄을 소리 내어 읽어라. 운송사 사람 앞에서 ELD 인증을 주장하면 30초 만에 신뢰를 잃는다.</a:t>
+              <a:t>5:20–6:00. Best Mobile App이 특별상 다섯 개 중 하나다. 여기 40초는 싸게 먹힌다. 맨 아래 회색 줄은 반드시 소리 내어 읽는다.</a:t>
+            </a:r>
+          </a:p>
+          <a:p/>
+          <a:p>
+            <a:r>
+              <a:t>읽을 것 — 아래 영어를 그대로</a:t>
+            </a:r>
+          </a:p>
+          <a:p/>
+          <a:p>
+            <a:r>
+              <a:t>▶ This is what the driver sees on his phone.</a:t>
+            </a:r>
+          </a:p>
+          <a:p/>
+          <a:p>
+            <a:r>
+              <a:t>▶ Hours at the top. His duty log underneath.</a:t>
+            </a:r>
+          </a:p>
+          <a:p/>
+          <a:p>
+            <a:r>
+              <a:t>▶ He taps once to confirm he arrived.</a:t>
+            </a:r>
+          </a:p>
+          <a:p/>
+          <a:p>
+            <a:r>
+              <a:t>▶ That tap is evidence. It sets when the billing clock starts, and it records who said so.</a:t>
+            </a:r>
+          </a:p>
+          <a:p/>
+          <a:p>
+            <a:r>
+              <a:t>▶ It is the difference between a claim and an argument.</a:t>
+            </a:r>
+          </a:p>
+          <a:p/>
+          <a:p>
+            <a:r>
+              <a:t>▶ And to be clear: this is a companion app. It is not a certified ELD. We do not claim that.</a:t>
+            </a:r>
+          </a:p>
+          <a:p/>
+          <a:p>
+            <a:r>
+              <a:t>과장하지 마라. 운송사 사람 앞에서 ELD 인증을 주장하면 30초 만에 신뢰를 잃는다.</a:t>
             </a:r>
           </a:p>
         </p:txBody>
@@ -1817,27 +2223,117 @@
           <a:lstStyle/>
           <a:p>
             <a:r>
-              <a:t>발표 전체에서 가장 큰 위험 구간이다. "실패한 데모"가 Presentation 항목의 1/5점 앵커로 명시돼 있다.</a:t>
-            </a:r>
-          </a:p>
-          <a:p>
-            <a:r>
-              <a:t> 오늘의 규칙: 라이브 앱이 15초 안에 원하는 걸 안 보여주면, 영상을 틀고 설명을 이어간다. </a:t>
-            </a:r>
-          </a:p>
-          <a:p>
-            <a:r>
-              <a:t> 무대에서 디버깅하지 마라. 절대로.</a:t>
-            </a:r>
-          </a:p>
-          <a:p>
-            <a:r>
-              <a:t> 준비: 문 닫히기 전에 타일 캐시와 시뮬레이터를 데워둔다. 시나리오를 미리 11:00 근처에 맞춰둔다.</a:t>
-            </a:r>
-          </a:p>
-          <a:p>
-            <a:r>
-              <a:t> 시간: 6~7분. 가장 긴 구간이고, 앞의 모든 것이 이걸 위한 준비였다.</a:t>
+              <a:t>6:00–11:00. 발표 전체에서 가장 위험한 구간이다. "실패한 데모"가 Presentation 항목의 1/5점 앵커로 브리프에 명시돼 있다.</a:t>
+            </a:r>
+          </a:p>
+          <a:p>
+            <a:r>
+              <a:t>오늘의 규칙: 라이브 앱이 15초 안에 원하는 걸 안 보여주면 영상을 틀고 설명을 이어간다. 무대에서 디버깅하지 마라. 절대로.</a:t>
+            </a:r>
+          </a:p>
+          <a:p>
+            <a:r>
+              <a:t>준비: 문 닫히기 전에 타일 캐시와 시뮬레이터를 데워둔다. 시나리오를 11:00 근처에 맞춰둔다.</a:t>
+            </a:r>
+          </a:p>
+          <a:p>
+            <a:r>
+              <a:t>순서: ① 구조 요청 → ② 도크 줄 → ③ 제안·수락 → ④ 청구 → ⑤ 패킷.</a:t>
+            </a:r>
+          </a:p>
+          <a:p/>
+          <a:p>
+            <a:r>
+              <a:t>읽을 것 — 아래 영어를 그대로</a:t>
+            </a:r>
+          </a:p>
+          <a:p/>
+          <a:p>
+            <a:r>
+              <a:t>▶ Let me do this live.</a:t>
+            </a:r>
+          </a:p>
+          <a:p/>
+          <a:p>
+            <a:r>
+              <a:t>▶ The next load is in trouble, so we look for a relief driver.</a:t>
+            </a:r>
+          </a:p>
+          <a:p/>
+          <a:p>
+            <a:r>
+              <a:t>▶ Candidates come back with reasons, not scores. Distance. Arrival time. Trailer type. Whether his hours cover the whole trip.</a:t>
+            </a:r>
+          </a:p>
+          <a:p/>
+          <a:p>
+            <a:r>
+              <a:t>▶ Drivers who cannot make it are blocked, and it says why.</a:t>
+            </a:r>
+          </a:p>
+          <a:p/>
+          <a:p>
+            <a:r>
+              <a:t>▶ Now read this line under each driver. This is the part I am most proud of.</a:t>
+            </a:r>
+          </a:p>
+          <a:p/>
+          <a:p>
+            <a:r>
+              <a:t>▶ The plan gives every dock forty-five minutes. That is the industry default, and it is in every planning tool.</a:t>
+            </a:r>
+          </a:p>
+          <a:p/>
+          <a:p>
+            <a:r>
+              <a:t>▶ But this lane's real docks take longer. We know that, because it is in your file.</a:t>
+            </a:r>
+          </a:p>
+          <a:p/>
+          <a:p>
+            <a:r>
+              <a:t>▶ Costed that way, this driver is eleven minutes past a legal stop. Four of seven candidates flip.</a:t>
+            </a:r>
+          </a:p>
+          <a:p/>
+          <a:p>
+            <a:r>
+              <a:t>▶ The decision still uses the fixed rule. The history sits beside it, with its sample size, so a dispatcher can disagree with us.</a:t>
+            </a:r>
+          </a:p>
+          <a:p/>
+          <a:p>
+            <a:r>
+              <a:t>▶ One offer goes out. The driver accepts on his phone. The load is saved.</a:t>
+            </a:r>
+          </a:p>
+          <a:p/>
+          <a:p>
+            <a:r>
+              <a:t>▶ And back at the original stop, he is released, and the charge writes itself.</a:t>
+            </a:r>
+          </a:p>
+          <a:p/>
+          <a:p>
+            <a:r>
+              <a:t>▶ Fifteen billable minutes. Eighteen dollars and seventy-five cents.</a:t>
+            </a:r>
+          </a:p>
+          <a:p/>
+          <a:p>
+            <a:r>
+              <a:t>▶ That is a small number. That is the point. Nobody chases eighteen dollars by hand. That is why it is never billed.</a:t>
+            </a:r>
+          </a:p>
+          <a:p/>
+          <a:p>
+            <a:r>
+              <a:t>가장 긴 구간이고 앞의 모든 것이 이걸 위한 준비였다. 5분.</a:t>
+            </a:r>
+          </a:p>
+          <a:p>
+            <a:r>
+              <a:t>죽으면: "Let me show you the recording and talk over it." — 그리고 계속 말한다.</a:t>
             </a:r>
           </a:p>
         </p:txBody>
@@ -5497,11 +5993,66 @@
           </a:prstGeom>
         </p:spPr>
       </p:pic>
+      <p:pic>
+        <p:nvPicPr>
+          <p:cNvPr id="3" name="backup.mp4">
+            <a:hlinkClick r:id="" action="ppaction://media"/>
+          </p:cNvPr>
+          <p:cNvPicPr>
+            <a:picLocks noChangeAspect="1"/>
+          </p:cNvPicPr>
+          <p:nvPr>
+            <a:videoFile r:link="rId4"/>
+            <p:extLst>
+              <p:ext uri="{DAA4B4D4-6D71-4841-9C94-3DE7FCFB9230}">
+                <p14:media xmlns:p14="http://schemas.microsoft.com/office/powerpoint/2010/main" r:embed="rId3"/>
+              </p:ext>
+            </p:extLst>
+          </p:nvPr>
+        </p:nvPicPr>
+        <p:blipFill>
+          <a:blip r:embed="rId5"/>
+          <a:stretch>
+            <a:fillRect/>
+          </a:stretch>
+        </p:blipFill>
+        <p:spPr>
+          <a:xfrm>
+            <a:off x="345380" y="2898278"/>
+            <a:ext cx="11501239" cy="3302000"/>
+          </a:xfrm>
+          <a:prstGeom prst="rect">
+            <a:avLst/>
+          </a:prstGeom>
+        </p:spPr>
+      </p:pic>
     </p:spTree>
   </p:cSld>
   <p:clrMapOvr>
     <a:masterClrMapping/>
   </p:clrMapOvr>
+  <p:timing>
+    <p:tnLst>
+      <p:par>
+        <p:cTn id="1" dur="indefinite" restart="never" nodeType="tmRoot">
+          <p:childTnLst>
+            <p:video>
+              <p:cMediaNode vol="80000">
+                <p:cTn id="2" fill="hold" display="0">
+                  <p:stCondLst>
+                    <p:cond delay="indefinite"/>
+                  </p:stCondLst>
+                </p:cTn>
+                <p:tgtEl>
+                  <p:spTgt spid="3"/>
+                </p:tgtEl>
+              </p:cMediaNode>
+            </p:video>
+          </p:childTnLst>
+        </p:cTn>
+      </p:par>
+    </p:tnLst>
+  </p:timing>
 </p:sld>
 </file>
 

--- a/docs/demo/deck/dockrisk-deck.pptx
+++ b/docs/demo/deck/dockrisk-deck.pptx
@@ -994,7 +994,7 @@
           <a:p/>
           <a:p>
             <a:r>
-              <a:t>▶ And stops over six hours never bill themselves. Forty-nine of those stops carry two thirds of all the detention hours in the file.</a:t>
+              <a:t>▶ And stops over six hours never bill themselves. Thirty-eight of those stops — one and a half percent — carry half of all the detention hours in the file.</a:t>
             </a:r>
           </a:p>
           <a:p/>

--- a/docs/demo/deck/dockrisk-deck.pptx
+++ b/docs/demo/deck/dockrisk-deck.pptx
@@ -6018,8 +6018,8 @@
         </p:blipFill>
         <p:spPr>
           <a:xfrm>
-            <a:off x="345380" y="2898278"/>
-            <a:ext cx="11501239" cy="3302000"/>
+            <a:off x="345380" y="2187178"/>
+            <a:ext cx="7558980" cy="4724300"/>
           </a:xfrm>
           <a:prstGeom prst="rect">
             <a:avLst/>

--- a/docs/demo/deck/dockrisk-deck.pptx
+++ b/docs/demo/deck/dockrisk-deck.pptx
@@ -6018,7 +6018,7 @@
         </p:blipFill>
         <p:spPr>
           <a:xfrm>
-            <a:off x="345380" y="2187178"/>
+            <a:off x="345380" y="2109390"/>
             <a:ext cx="7558980" cy="4724300"/>
           </a:xfrm>
           <a:prstGeom prst="rect">
